--- a/documentation/Session 2.pptx
+++ b/documentation/Session 2.pptx
@@ -3133,7 +3133,7 @@
             </a:pPr>
             <a:r>
               <a:rPr lang="en-US" dirty="0"/>
-              <a:t>While documenting an experiment you should document the procedure you followed as well as the results you achieved. A well-documented experiment should enable a reader to understand how you performed the test. It should contain enough details that they can critique and repeat the experiment. The results of the experiment and your interpretation should be recorder and clearly separated. Sometimes you need to document these experiments in order to communicate their outcome, e.g., to argue for design decisions in a development team or to communicate project outcomes to clients. Describing them as rigorous experiments can help others follow and double-check your decisions. </a:t>
+              <a:t>While documenting an experiment you should document the procedure you followed as well as the results you achieved. A well-documented experiment should enable a reader to understand how you performed the test. It should contain enough details that they can critique and repeat the experiment. The results of the experiment and your interpretation should be recorded and clearly separated. Sometimes you need to document these experiments in order to communicate their outcome, e.g., to argue for design decisions in a development team or to communicate project outcomes to clients. Describing them as rigorous experiments can help others follow and double-check your decisions. </a:t>
             </a:r>
           </a:p>
           <a:p>
@@ -5561,7 +5561,7 @@
             </a:pPr>
             <a:fld id="{00000000-1234-1234-1234-123412341234}" type="slidenum">
               <a:rPr lang="en"/>
-              <a:t>‹#›</a:t>
+              <a:t>‹Nr.›</a:t>
             </a:fld>
             <a:endParaRPr/>
           </a:p>
@@ -5923,7 +5923,7 @@
             </a:pPr>
             <a:fld id="{00000000-1234-1234-1234-123412341234}" type="slidenum">
               <a:rPr lang="en"/>
-              <a:t>‹#›</a:t>
+              <a:t>‹Nr.›</a:t>
             </a:fld>
             <a:endParaRPr/>
           </a:p>
@@ -6156,7 +6156,7 @@
             </a:pPr>
             <a:fld id="{00000000-1234-1234-1234-123412341234}" type="slidenum">
               <a:rPr lang="en"/>
-              <a:t>‹#›</a:t>
+              <a:t>‹Nr.›</a:t>
             </a:fld>
             <a:endParaRPr/>
           </a:p>
@@ -6518,7 +6518,7 @@
             </a:pPr>
             <a:fld id="{00000000-1234-1234-1234-123412341234}" type="slidenum">
               <a:rPr lang="en"/>
-              <a:t>‹#›</a:t>
+              <a:t>‹Nr.›</a:t>
             </a:fld>
             <a:endParaRPr/>
           </a:p>
@@ -6751,7 +6751,7 @@
             </a:pPr>
             <a:fld id="{00000000-1234-1234-1234-123412341234}" type="slidenum">
               <a:rPr lang="en"/>
-              <a:t>‹#›</a:t>
+              <a:t>‹Nr.›</a:t>
             </a:fld>
             <a:endParaRPr/>
           </a:p>
@@ -7309,7 +7309,7 @@
             </a:pPr>
             <a:fld id="{00000000-1234-1234-1234-123412341234}" type="slidenum">
               <a:rPr lang="en"/>
-              <a:t>‹#›</a:t>
+              <a:t>‹Nr.›</a:t>
             </a:fld>
             <a:endParaRPr/>
           </a:p>
@@ -7457,7 +7457,7 @@
             </a:pPr>
             <a:fld id="{00000000-1234-1234-1234-123412341234}" type="slidenum">
               <a:rPr lang="en"/>
-              <a:t>‹#›</a:t>
+              <a:t>‹Nr.›</a:t>
             </a:fld>
             <a:endParaRPr/>
           </a:p>
@@ -7821,7 +7821,7 @@
             </a:pPr>
             <a:fld id="{00000000-1234-1234-1234-123412341234}" type="slidenum">
               <a:rPr lang="en"/>
-              <a:t>‹#›</a:t>
+              <a:t>‹Nr.›</a:t>
             </a:fld>
             <a:endParaRPr/>
           </a:p>
@@ -7925,7 +7925,7 @@
             </a:pPr>
             <a:fld id="{00000000-1234-1234-1234-123412341234}" type="slidenum">
               <a:rPr lang="en"/>
-              <a:t>‹#›</a:t>
+              <a:t>‹Nr.›</a:t>
             </a:fld>
             <a:endParaRPr/>
           </a:p>
@@ -8496,7 +8496,7 @@
             </a:pPr>
             <a:fld id="{00000000-1234-1234-1234-123412341234}" type="slidenum">
               <a:rPr lang="en"/>
-              <a:t>‹#›</a:t>
+              <a:t>‹Nr.›</a:t>
             </a:fld>
             <a:endParaRPr/>
           </a:p>
@@ -16803,35 +16803,6 @@
             </a:r>
           </a:p>
           <a:p>
-            <a:pPr marL="1074738" lvl="2" indent="357188">
-              <a:spcBef>
-                <a:spcPts val="0"/>
-              </a:spcBef>
-              <a:buClr>
-                <a:srgbClr val="72AF2F"/>
-              </a:buClr>
-              <a:buSzPts val="1800"/>
-              <a:buFont typeface="Arial"/>
-              <a:buChar char="●"/>
-            </a:pPr>
-            <a:r>
-              <a:rPr lang="en-US" sz="2000" dirty="0" err="1">
-                <a:solidFill>
-                  <a:srgbClr val="72AF2F"/>
-                </a:solidFill>
-              </a:rPr>
-              <a:t>Deepnote</a:t>
-            </a:r>
-            <a:r>
-              <a:rPr lang="en-US" sz="2000" dirty="0">
-                <a:solidFill>
-                  <a:srgbClr val="72AF2F"/>
-                </a:solidFill>
-              </a:rPr>
-              <a:t> is recommended in a teaching context</a:t>
-            </a:r>
-          </a:p>
-          <a:p>
             <a:pPr marL="114300" indent="0">
               <a:buNone/>
             </a:pPr>
@@ -17206,7 +17177,7 @@
                                         <p:tgtEl>
                                           <p:spTgt spid="4">
                                             <p:txEl>
-                                              <p:pRg st="6" end="6"/>
+                                              <p:pRg st="7" end="7"/>
                                             </p:txEl>
                                           </p:spTgt>
                                         </p:tgtEl>
@@ -17338,7 +17309,7 @@
                             </p:stCondLst>
                             <p:childTnLst>
                               <p:par>
-                                <p:cTn id="37" presetID="1" presetClass="entr" presetSubtype="0" fill="hold" nodeType="clickEffect">
+                                <p:cTn id="37" presetID="1" presetClass="exit" presetSubtype="0" fill="hold" grpId="0" nodeType="clickEffect">
                                   <p:stCondLst>
                                     <p:cond delay="0"/>
                                   </p:stCondLst>
@@ -17353,7 +17324,7 @@
                                         <p:tgtEl>
                                           <p:spTgt spid="4">
                                             <p:txEl>
-                                              <p:pRg st="10" end="10"/>
+                                              <p:pRg st="0" end="0"/>
                                             </p:txEl>
                                           </p:spTgt>
                                         </p:tgtEl>
@@ -17362,32 +17333,45 @@
                                         </p:attrNameLst>
                                       </p:cBhvr>
                                       <p:to>
-                                        <p:strVal val="visible"/>
+                                        <p:strVal val="hidden"/>
                                       </p:to>
                                     </p:set>
                                   </p:childTnLst>
                                 </p:cTn>
                               </p:par>
-                            </p:childTnLst>
-                          </p:cTn>
-                        </p:par>
-                      </p:childTnLst>
-                    </p:cTn>
-                  </p:par>
-                  <p:par>
-                    <p:cTn id="39" fill="hold">
-                      <p:stCondLst>
-                        <p:cond delay="indefinite"/>
-                      </p:stCondLst>
-                      <p:childTnLst>
-                        <p:par>
-                          <p:cTn id="40" fill="hold">
-                            <p:stCondLst>
-                              <p:cond delay="0"/>
-                            </p:stCondLst>
-                            <p:childTnLst>
                               <p:par>
-                                <p:cTn id="41" presetID="1" presetClass="exit" presetSubtype="0" fill="hold" grpId="0" nodeType="clickEffect">
+                                <p:cTn id="39" presetID="1" presetClass="exit" presetSubtype="0" fill="hold" grpId="0" nodeType="withEffect">
+                                  <p:stCondLst>
+                                    <p:cond delay="0"/>
+                                  </p:stCondLst>
+                                  <p:childTnLst>
+                                    <p:set>
+                                      <p:cBhvr>
+                                        <p:cTn id="40" dur="1" fill="hold">
+                                          <p:stCondLst>
+                                            <p:cond delay="0"/>
+                                          </p:stCondLst>
+                                        </p:cTn>
+                                        <p:tgtEl>
+                                          <p:spTgt spid="4">
+                                            <p:txEl>
+                                              <p:pRg st="1" end="1"/>
+                                            </p:txEl>
+                                          </p:spTgt>
+                                        </p:tgtEl>
+                                        <p:attrNameLst>
+                                          <p:attrName>style.visibility</p:attrName>
+                                        </p:attrNameLst>
+                                      </p:cBhvr>
+                                      <p:to>
+                                        <p:strVal val="hidden"/>
+                                      </p:to>
+                                    </p:set>
+                                  </p:childTnLst>
+                                </p:cTn>
+                              </p:par>
+                              <p:par>
+                                <p:cTn id="41" presetID="1" presetClass="exit" presetSubtype="0" fill="hold" grpId="0" nodeType="withEffect">
                                   <p:stCondLst>
                                     <p:cond delay="0"/>
                                   </p:stCondLst>
@@ -17402,7 +17386,7 @@
                                         <p:tgtEl>
                                           <p:spTgt spid="4">
                                             <p:txEl>
-                                              <p:pRg st="0" end="0"/>
+                                              <p:pRg st="2" end="2"/>
                                             </p:txEl>
                                           </p:spTgt>
                                         </p:tgtEl>
@@ -17433,7 +17417,7 @@
                                         <p:tgtEl>
                                           <p:spTgt spid="4">
                                             <p:txEl>
-                                              <p:pRg st="1" end="1"/>
+                                              <p:pRg st="4" end="4"/>
                                             </p:txEl>
                                           </p:spTgt>
                                         </p:tgtEl>
@@ -17464,7 +17448,7 @@
                                         <p:tgtEl>
                                           <p:spTgt spid="4">
                                             <p:txEl>
-                                              <p:pRg st="2" end="2"/>
+                                              <p:pRg st="5" end="5"/>
                                             </p:txEl>
                                           </p:spTgt>
                                         </p:tgtEl>
@@ -17495,7 +17479,7 @@
                                         <p:tgtEl>
                                           <p:spTgt spid="4">
                                             <p:txEl>
-                                              <p:pRg st="4" end="4"/>
+                                              <p:pRg st="7" end="7"/>
                                             </p:txEl>
                                           </p:spTgt>
                                         </p:tgtEl>
@@ -17526,7 +17510,7 @@
                                         <p:tgtEl>
                                           <p:spTgt spid="4">
                                             <p:txEl>
-                                              <p:pRg st="5" end="5"/>
+                                              <p:pRg st="8" end="8"/>
                                             </p:txEl>
                                           </p:spTgt>
                                         </p:tgtEl>
@@ -17557,7 +17541,7 @@
                                         <p:tgtEl>
                                           <p:spTgt spid="4">
                                             <p:txEl>
-                                              <p:pRg st="6" end="6"/>
+                                              <p:pRg st="9" end="9"/>
                                             </p:txEl>
                                           </p:spTgt>
                                         </p:tgtEl>
@@ -17586,99 +17570,6 @@
                                           </p:stCondLst>
                                         </p:cTn>
                                         <p:tgtEl>
-                                          <p:spTgt spid="4">
-                                            <p:txEl>
-                                              <p:pRg st="8" end="8"/>
-                                            </p:txEl>
-                                          </p:spTgt>
-                                        </p:tgtEl>
-                                        <p:attrNameLst>
-                                          <p:attrName>style.visibility</p:attrName>
-                                        </p:attrNameLst>
-                                      </p:cBhvr>
-                                      <p:to>
-                                        <p:strVal val="hidden"/>
-                                      </p:to>
-                                    </p:set>
-                                  </p:childTnLst>
-                                </p:cTn>
-                              </p:par>
-                              <p:par>
-                                <p:cTn id="55" presetID="1" presetClass="exit" presetSubtype="0" fill="hold" grpId="0" nodeType="withEffect">
-                                  <p:stCondLst>
-                                    <p:cond delay="0"/>
-                                  </p:stCondLst>
-                                  <p:childTnLst>
-                                    <p:set>
-                                      <p:cBhvr>
-                                        <p:cTn id="56" dur="1" fill="hold">
-                                          <p:stCondLst>
-                                            <p:cond delay="0"/>
-                                          </p:stCondLst>
-                                        </p:cTn>
-                                        <p:tgtEl>
-                                          <p:spTgt spid="4">
-                                            <p:txEl>
-                                              <p:pRg st="9" end="9"/>
-                                            </p:txEl>
-                                          </p:spTgt>
-                                        </p:tgtEl>
-                                        <p:attrNameLst>
-                                          <p:attrName>style.visibility</p:attrName>
-                                        </p:attrNameLst>
-                                      </p:cBhvr>
-                                      <p:to>
-                                        <p:strVal val="hidden"/>
-                                      </p:to>
-                                    </p:set>
-                                  </p:childTnLst>
-                                </p:cTn>
-                              </p:par>
-                              <p:par>
-                                <p:cTn id="57" presetID="1" presetClass="exit" presetSubtype="0" fill="hold" grpId="0" nodeType="withEffect">
-                                  <p:stCondLst>
-                                    <p:cond delay="0"/>
-                                  </p:stCondLst>
-                                  <p:childTnLst>
-                                    <p:set>
-                                      <p:cBhvr>
-                                        <p:cTn id="58" dur="1" fill="hold">
-                                          <p:stCondLst>
-                                            <p:cond delay="0"/>
-                                          </p:stCondLst>
-                                        </p:cTn>
-                                        <p:tgtEl>
-                                          <p:spTgt spid="4">
-                                            <p:txEl>
-                                              <p:pRg st="10" end="10"/>
-                                            </p:txEl>
-                                          </p:spTgt>
-                                        </p:tgtEl>
-                                        <p:attrNameLst>
-                                          <p:attrName>style.visibility</p:attrName>
-                                        </p:attrNameLst>
-                                      </p:cBhvr>
-                                      <p:to>
-                                        <p:strVal val="hidden"/>
-                                      </p:to>
-                                    </p:set>
-                                  </p:childTnLst>
-                                </p:cTn>
-                              </p:par>
-                              <p:par>
-                                <p:cTn id="59" presetID="1" presetClass="exit" presetSubtype="0" fill="hold" grpId="0" nodeType="withEffect">
-                                  <p:stCondLst>
-                                    <p:cond delay="0"/>
-                                  </p:stCondLst>
-                                  <p:childTnLst>
-                                    <p:set>
-                                      <p:cBhvr>
-                                        <p:cTn id="60" dur="1" fill="hold">
-                                          <p:stCondLst>
-                                            <p:cond delay="0"/>
-                                          </p:stCondLst>
-                                        </p:cTn>
-                                        <p:tgtEl>
                                           <p:spTgt spid="3"/>
                                         </p:tgtEl>
                                         <p:attrNameLst>
@@ -17693,14 +17584,14 @@
                                 </p:cTn>
                               </p:par>
                               <p:par>
-                                <p:cTn id="61" presetID="42" presetClass="path" presetSubtype="0" accel="50000" decel="50000" fill="hold" nodeType="withEffect">
+                                <p:cTn id="55" presetID="42" presetClass="path" presetSubtype="0" accel="50000" decel="50000" fill="hold" nodeType="withEffect">
                                   <p:stCondLst>
                                     <p:cond delay="0"/>
                                   </p:stCondLst>
                                   <p:childTnLst>
                                     <p:animMotion origin="layout" path="M 1.11111E-6 0 L 0.48229 -0.00031 " pathEditMode="relative" rAng="0" ptsTypes="AA">
                                       <p:cBhvr>
-                                        <p:cTn id="62" dur="2000" fill="hold"/>
+                                        <p:cTn id="56" dur="2000" fill="hold"/>
                                         <p:tgtEl>
                                           <p:spTgt spid="2"/>
                                         </p:tgtEl>
@@ -19076,24 +18967,7 @@
                   <a:srgbClr val="72AF2F"/>
                 </a:solidFill>
               </a:rPr>
-              <a:t>Post the cell content into this Google Form (</a:t>
-            </a:r>
-            <a:r>
-              <a:rPr lang="en-US" sz="2000" dirty="0">
-                <a:solidFill>
-                  <a:srgbClr val="72AF2F"/>
-                </a:solidFill>
-                <a:hlinkClick r:id="rId3"/>
-              </a:rPr>
-              <a:t>link</a:t>
-            </a:r>
-            <a:r>
-              <a:rPr lang="en-US" sz="2000" dirty="0">
-                <a:solidFill>
-                  <a:srgbClr val="72AF2F"/>
-                </a:solidFill>
-              </a:rPr>
-              <a:t>)</a:t>
+              <a:t>Keep track of the best model you found.</a:t>
             </a:r>
           </a:p>
           <a:p>
@@ -22895,23 +22769,7 @@
                   <a:srgbClr val="72AF2F"/>
                 </a:solidFill>
               </a:rPr>
-              <a:t>Methods: How will you </a:t>
-            </a:r>
-            <a:r>
-              <a:rPr lang="en-US" sz="2000" dirty="0" err="1">
-                <a:solidFill>
-                  <a:srgbClr val="72AF2F"/>
-                </a:solidFill>
-              </a:rPr>
-              <a:t>contrdict</a:t>
-            </a:r>
-            <a:r>
-              <a:rPr lang="en-US" sz="2000" dirty="0">
-                <a:solidFill>
-                  <a:srgbClr val="72AF2F"/>
-                </a:solidFill>
-              </a:rPr>
-              <a:t> your experiment</a:t>
+              <a:t>Methods: How will you conduct your experiment?</a:t>
             </a:r>
           </a:p>
           <a:p>
